--- a/curso_es/pptx/S87.pptx
+++ b/curso_es/pptx/S87.pptx
@@ -3799,7 +3799,7 @@
                 </a:solidFill>
                 <a:latin typeface="Nunito Sans"/>
               </a:rPr>
-              <a:t>Toda la cuadrilla de Leire lleva la misma sudadera. A Leire no le encanta, pero la pide para su cumpleaños. (Ejemplo inventado.)</a:t>
+              <a:t>Toda la cuadrilla de una chica lleva la misma sudadera. A ella no le encanta, pero la pide para su cumpleaños. (Ejemplo inventado.)</a:t>
             </a:r>
           </a:p>
         </p:txBody>
@@ -4126,7 +4126,7 @@
                 </a:solidFill>
                 <a:latin typeface="Nunito Sans"/>
               </a:rPr>
-              <a:t>Dylan va a correr la carrera del instituto con unas zapatillas de moda: «Las lleva todo el mundo, así que serán las mejores para correr».</a:t>
+              <a:t>Un chico va a correr la carrera del instituto con unas zapatillas de moda: «Las lleva todo el mundo, así que serán las mejores para correr».</a:t>
             </a:r>
           </a:p>
         </p:txBody>
@@ -4489,7 +4489,7 @@
                 </a:solidFill>
                 <a:latin typeface="Nunito Sans"/>
               </a:rPr>
-              <a:t>Kevin dice: «El rosa siempre ha sido de chicas y el azul, de chicos. Es natural».</a:t>
+              <a:t>Un chico dice: «El rosa siempre ha sido de chicas y el azul, de chicos. Es natural».</a:t>
             </a:r>
           </a:p>
         </p:txBody>
@@ -4816,7 +4816,7 @@
                 </a:solidFill>
                 <a:latin typeface="Nunito Sans"/>
               </a:rPr>
-              <a:t>Aitor viste siempre de negro, como los fans de su grupo de música favorito. «Yo no sigo modas: los que las siguen son borregos», dice. (Ejemplo inventado.)</a:t>
+              <a:t>Un chico viste siempre de negro, como los fans de su grupo de música favorito. «Yo no sigo modas: los que las siguen son borregos», dice. (Ejemplo inventado.)</a:t>
             </a:r>
           </a:p>
         </p:txBody>
@@ -4864,7 +4864,7 @@
                 </a:solidFill>
                 <a:latin typeface="Nunito Sans"/>
               </a:rPr>
-              <a:t>¿Está Aitor fuera de las modas?</a:t>
+              <a:t>¿Está ese chico fuera de las modas?</a:t>
             </a:r>
           </a:p>
           <a:p>
